--- a/00_arch/podman/ppt/Trigger_Based_vs_Time_Based.pptx
+++ b/00_arch/podman/ppt/Trigger_Based_vs_Time_Based.pptx
@@ -3149,7 +3149,7 @@
         <p:spPr>
           <a:xfrm>
             <a:off x="411480" y="91440"/>
-            <a:ext cx="8686800" cy="457200"/>
+            <a:ext cx="9601200" cy="457200"/>
           </a:xfrm>
           <a:prstGeom prst="rect">
             <a:avLst/>
@@ -3188,7 +3188,7 @@
         <p:spPr>
           <a:xfrm>
             <a:off x="411480" y="548640"/>
-            <a:ext cx="9601200" cy="365760"/>
+            <a:ext cx="10058400" cy="365760"/>
           </a:xfrm>
           <a:prstGeom prst="rect">
             <a:avLst/>
@@ -3271,7 +3271,7 @@
         <p:spPr>
           <a:xfrm>
             <a:off x="411480" y="1188720"/>
-            <a:ext cx="5532120" cy="1874519"/>
+            <a:ext cx="5532120" cy="1911095"/>
           </a:xfrm>
           <a:prstGeom prst="roundRect">
             <a:avLst>
@@ -3317,7 +3317,7 @@
         <p:spPr>
           <a:xfrm>
             <a:off x="411480" y="1188720"/>
-            <a:ext cx="82296" cy="1874519"/>
+            <a:ext cx="82296" cy="1911095"/>
           </a:xfrm>
           <a:prstGeom prst="rect">
             <a:avLst/>
@@ -3400,7 +3400,7 @@
         <p:spPr>
           <a:xfrm>
             <a:off x="685800" y="1664208"/>
-            <a:ext cx="5029200" cy="1325880"/>
+            <a:ext cx="5029200" cy="1362455"/>
           </a:xfrm>
           <a:prstGeom prst="rect">
             <a:avLst/>
@@ -3418,7 +3418,7 @@
                 <a:spcPct val="105000"/>
               </a:lnSpc>
               <a:spcAft>
-                <a:spcPts val="500"/>
+                <a:spcPts val="400"/>
               </a:spcAft>
             </a:pPr>
             <a:r>
@@ -3437,7 +3437,7 @@
                 <a:spcPct val="105000"/>
               </a:lnSpc>
               <a:spcAft>
-                <a:spcPts val="500"/>
+                <a:spcPts val="400"/>
               </a:spcAft>
             </a:pPr>
             <a:r>
@@ -3456,7 +3456,7 @@
                 <a:spcPct val="105000"/>
               </a:lnSpc>
               <a:spcAft>
-                <a:spcPts val="500"/>
+                <a:spcPts val="400"/>
               </a:spcAft>
             </a:pPr>
             <a:r>
@@ -3480,7 +3480,7 @@
         <p:spPr>
           <a:xfrm>
             <a:off x="6172200" y="1188720"/>
-            <a:ext cx="5532120" cy="1874519"/>
+            <a:ext cx="5532120" cy="1911095"/>
           </a:xfrm>
           <a:prstGeom prst="roundRect">
             <a:avLst>
@@ -3526,7 +3526,7 @@
         <p:spPr>
           <a:xfrm>
             <a:off x="6172200" y="1188720"/>
-            <a:ext cx="82296" cy="1874519"/>
+            <a:ext cx="82296" cy="1911095"/>
           </a:xfrm>
           <a:prstGeom prst="rect">
             <a:avLst/>
@@ -3609,7 +3609,7 @@
         <p:spPr>
           <a:xfrm>
             <a:off x="6446520" y="1664208"/>
-            <a:ext cx="5029200" cy="1325880"/>
+            <a:ext cx="5029200" cy="1362455"/>
           </a:xfrm>
           <a:prstGeom prst="rect">
             <a:avLst/>
@@ -3656,7 +3656,7 @@
                 </a:solidFill>
                 <a:latin typeface="Calibri"/>
               </a:rPr>
-              <a:t>•  No fixed clock time — no more “fired too early, no data” failures</a:t>
+              <a:t>•  No fixed clock time — no more "fired too early, no data" failures</a:t>
             </a:r>
           </a:p>
           <a:p>
@@ -3694,7 +3694,7 @@
                 </a:solidFill>
                 <a:latin typeface="Calibri"/>
               </a:rPr>
-              <a:t>•  Absorbs upstream delays cleanly — old time-bound configs meant a delay caused two days' data to land and run together, needing L2 to manually split files by date and reprocess; across multiple mandates this became a massive manual effort</a:t>
+              <a:t>•  Absorbs upstream delays cleanly — under the old time-bound configs, a delayed upstream feed meant two days' data landing and running together in the same cycle, requiring L2 to manually split files by date and reprocess; with multiple mandates hitting this at once, it became a massive manual effort</a:t>
             </a:r>
           </a:p>
         </p:txBody>
@@ -3707,7 +3707,7 @@
         </p:nvSpPr>
         <p:spPr>
           <a:xfrm>
-            <a:off x="411480" y="3246119"/>
+            <a:off x="411480" y="3282695"/>
             <a:ext cx="2705023" cy="777240"/>
           </a:xfrm>
           <a:prstGeom prst="roundRect">
@@ -3755,7 +3755,7 @@
         </p:nvSpPr>
         <p:spPr>
           <a:xfrm>
-            <a:off x="594360" y="3328415"/>
+            <a:off x="594360" y="3364991"/>
             <a:ext cx="2375839" cy="329184"/>
           </a:xfrm>
           <a:prstGeom prst="rect">
@@ -3794,7 +3794,7 @@
         </p:nvSpPr>
         <p:spPr>
           <a:xfrm>
-            <a:off x="594360" y="3666743"/>
+            <a:off x="594360" y="3703319"/>
             <a:ext cx="2375839" cy="329184"/>
           </a:xfrm>
           <a:prstGeom prst="rect">
@@ -3833,7 +3833,7 @@
         </p:nvSpPr>
         <p:spPr>
           <a:xfrm>
-            <a:off x="3299383" y="3246119"/>
+            <a:off x="3299383" y="3282695"/>
             <a:ext cx="2705023" cy="777240"/>
           </a:xfrm>
           <a:prstGeom prst="roundRect">
@@ -3881,7 +3881,7 @@
         </p:nvSpPr>
         <p:spPr>
           <a:xfrm>
-            <a:off x="3482263" y="3328415"/>
+            <a:off x="3482263" y="3364991"/>
             <a:ext cx="2375839" cy="329184"/>
           </a:xfrm>
           <a:prstGeom prst="rect">
@@ -3907,7 +3907,7 @@
                 </a:solidFill>
                 <a:latin typeface="Calibri"/>
               </a:rPr>
-              <a:t>AVG. UPSTREAM DELAY REDUCED</a:t>
+              <a:t>AVG. UPSTREAM DELAY (WHEN LATE)</a:t>
             </a:r>
           </a:p>
         </p:txBody>
@@ -3920,7 +3920,7 @@
         </p:nvSpPr>
         <p:spPr>
           <a:xfrm>
-            <a:off x="3482263" y="3666743"/>
+            <a:off x="3482263" y="3703319"/>
             <a:ext cx="2375839" cy="329184"/>
           </a:xfrm>
           <a:prstGeom prst="rect">
@@ -3959,7 +3959,7 @@
         </p:nvSpPr>
         <p:spPr>
           <a:xfrm>
-            <a:off x="6187287" y="3246119"/>
+            <a:off x="6187287" y="3282695"/>
             <a:ext cx="2705023" cy="777240"/>
           </a:xfrm>
           <a:prstGeom prst="roundRect">
@@ -4007,7 +4007,7 @@
         </p:nvSpPr>
         <p:spPr>
           <a:xfrm>
-            <a:off x="6370167" y="3328415"/>
+            <a:off x="6370167" y="3364991"/>
             <a:ext cx="2375839" cy="329184"/>
           </a:xfrm>
           <a:prstGeom prst="rect">
@@ -4046,7 +4046,7 @@
         </p:nvSpPr>
         <p:spPr>
           <a:xfrm>
-            <a:off x="6370167" y="3666743"/>
+            <a:off x="6370167" y="3703319"/>
             <a:ext cx="2375839" cy="329184"/>
           </a:xfrm>
           <a:prstGeom prst="rect">
@@ -4085,7 +4085,7 @@
         </p:nvSpPr>
         <p:spPr>
           <a:xfrm>
-            <a:off x="9075191" y="3246119"/>
+            <a:off x="9075191" y="3282695"/>
             <a:ext cx="2705023" cy="777240"/>
           </a:xfrm>
           <a:prstGeom prst="roundRect">
@@ -4133,7 +4133,7 @@
         </p:nvSpPr>
         <p:spPr>
           <a:xfrm>
-            <a:off x="9258071" y="3328415"/>
+            <a:off x="9258071" y="3364991"/>
             <a:ext cx="2375839" cy="329184"/>
           </a:xfrm>
           <a:prstGeom prst="rect">
@@ -4172,7 +4172,7 @@
         </p:nvSpPr>
         <p:spPr>
           <a:xfrm>
-            <a:off x="9258071" y="3666743"/>
+            <a:off x="9258071" y="3703319"/>
             <a:ext cx="2375839" cy="329184"/>
           </a:xfrm>
           <a:prstGeom prst="rect">
@@ -4203,17 +4203,56 @@
           </a:p>
         </p:txBody>
       </p:sp>
+      <p:sp>
+        <p:nvSpPr>
+          <p:cNvPr id="26" name="TextBox 25"/>
+          <p:cNvSpPr txBox="1"/>
+          <p:nvPr/>
+        </p:nvSpPr>
+        <p:spPr>
+          <a:xfrm>
+            <a:off x="411480" y="4187951"/>
+            <a:ext cx="8229600" cy="274320"/>
+          </a:xfrm>
+          <a:prstGeom prst="rect">
+            <a:avLst/>
+          </a:prstGeom>
+          <a:noFill/>
+        </p:spPr>
+        <p:txBody>
+          <a:bodyPr wrap="square" anchor="t" lIns="0" rIns="0" tIns="0" bIns="0">
+            <a:spAutoFit/>
+          </a:bodyPr>
+          <a:lstStyle/>
+          <a:p>
+            <a:pPr algn="l">
+              <a:lnSpc>
+                <a:spcPct val="100000"/>
+              </a:lnSpc>
+            </a:pPr>
+            <a:r>
+              <a:rPr sz="1300" b="1" i="0">
+                <a:solidFill>
+                  <a:srgbClr val="1B2A4A"/>
+                </a:solidFill>
+                <a:latin typeface="Calibri"/>
+              </a:rPr>
+              <a:t>CPS – Datahub (go-live: 21/07/2026)</a:t>
+            </a:r>
+          </a:p>
+        </p:txBody>
+      </p:sp>
       <p:graphicFrame>
         <p:nvGraphicFramePr>
-          <p:cNvPr id="26" name="Table 25"/>
+          <p:cNvPr id="27" name="Table 26"/>
           <p:cNvGraphicFramePr>
             <a:graphicFrameLocks noGrp="1"/>
           </p:cNvGraphicFramePr>
           <p:nvPr/>
         </p:nvGraphicFramePr>
         <p:xfrm>
-          <a:off x="411480" y="4224527"/>
-          <a:ext cx="11368731" cy="2377440"/>
+          <a:off x="411480" y="4480559"/>
+          <a:ext cx="11368731" cy="2121408"/>
         </p:xfrm>
         <a:graphic>
           <a:graphicData uri="http://schemas.openxmlformats.org/drawingml/2006/table">
@@ -4222,21 +4261,21 @@
                 <a:tableStyleId>{5C22544A-7EE6-4342-B048-85BDC9FD1C3A}</a:tableStyleId>
               </a:tblPr>
               <a:tblGrid>
-                <a:gridCol w="2273747"/>
-                <a:gridCol w="1136873"/>
-                <a:gridCol w="1136873"/>
-                <a:gridCol w="1477935"/>
-                <a:gridCol w="1477935"/>
-                <a:gridCol w="1932684"/>
-                <a:gridCol w="1932684"/>
+                <a:gridCol w="1935103"/>
+                <a:gridCol w="1128810"/>
+                <a:gridCol w="725663"/>
+                <a:gridCol w="1935103"/>
+                <a:gridCol w="1531957"/>
+                <a:gridCol w="1370698"/>
+                <a:gridCol w="2741397"/>
               </a:tblGrid>
-              <a:tr h="566928">
+              <a:tr h="548640">
                 <a:tc>
                   <a:txBody>
                     <a:bodyPr wrap="square"/>
                     <a:lstStyle/>
                     <a:p>
-                      <a:pPr algn="ctr"/>
+                      <a:pPr algn="l"/>
                       <a:r>
                         <a:rPr sz="950" b="1">
                           <a:solidFill>
@@ -4267,19 +4306,7 @@
                           </a:solidFill>
                           <a:latin typeface="Calibri"/>
                         </a:rPr>
-                        <a:t>Previous</a:t>
-                      </a:r>
-                    </a:p>
-                    <a:p>
-                      <a:pPr algn="ctr"/>
-                      <a:r>
-                        <a:rPr sz="950" b="1">
-                          <a:solidFill>
-                            <a:srgbClr val="FFFFFF"/>
-                          </a:solidFill>
-                          <a:latin typeface="Calibri"/>
-                        </a:rPr>
-                        <a:t>Start Time</a:t>
+                        <a:t>Previous Start</a:t>
                       </a:r>
                     </a:p>
                   </a:txBody>
@@ -4302,19 +4329,7 @@
                           </a:solidFill>
                           <a:latin typeface="Calibri"/>
                         </a:rPr>
-                        <a:t>New Automated</a:t>
-                      </a:r>
-                    </a:p>
-                    <a:p>
-                      <a:pPr algn="ctr"/>
-                      <a:r>
-                        <a:rPr sz="950" b="1">
-                          <a:solidFill>
-                            <a:srgbClr val="FFFFFF"/>
-                          </a:solidFill>
-                          <a:latin typeface="Calibri"/>
-                        </a:rPr>
-                        <a:t>Start Time</a:t>
+                        <a:t>New Start</a:t>
                       </a:r>
                     </a:p>
                   </a:txBody>
@@ -4337,19 +4352,7 @@
                           </a:solidFill>
                           <a:latin typeface="Calibri"/>
                         </a:rPr>
-                        <a:t>Avg. Improvement</a:t>
-                      </a:r>
-                    </a:p>
-                    <a:p>
-                      <a:pPr algn="ctr"/>
-                      <a:r>
-                        <a:rPr sz="950" b="1">
-                          <a:solidFill>
-                            <a:srgbClr val="FFFFFF"/>
-                          </a:solidFill>
-                          <a:latin typeface="Calibri"/>
-                        </a:rPr>
-                        <a:t>(Early)</a:t>
+                        <a:t>Avg. Improvement (Early)</a:t>
                       </a:r>
                     </a:p>
                   </a:txBody>
@@ -4372,9 +4375,20 @@
                           </a:solidFill>
                           <a:latin typeface="Calibri"/>
                         </a:rPr>
-                        <a:t>Avg. Upstream</a:t>
+                        <a:t>Avg. Upstream Delay</a:t>
                       </a:r>
                     </a:p>
+                  </a:txBody>
+                  <a:tcPr anchor="ctr" marL="73152" marR="73152" marT="18288" marB="18288">
+                    <a:solidFill>
+                      <a:srgbClr val="1B2A4A"/>
+                    </a:solidFill>
+                  </a:tcPr>
+                </a:tc>
+                <a:tc>
+                  <a:txBody>
+                    <a:bodyPr wrap="square"/>
+                    <a:lstStyle/>
                     <a:p>
                       <a:pPr algn="ctr"/>
                       <a:r>
@@ -4384,7 +4398,7 @@
                           </a:solidFill>
                           <a:latin typeface="Calibri"/>
                         </a:rPr>
-                        <a:t>Delay</a:t>
+                        <a:t>Incidents Avoided</a:t>
                       </a:r>
                     </a:p>
                   </a:txBody>
@@ -4419,54 +4433,7 @@
                           </a:solidFill>
                           <a:latin typeface="Calibri"/>
                         </a:rPr>
-                        <a:t>(Late Arrival /</a:t>
-                      </a:r>
-                    </a:p>
-                    <a:p>
-                      <a:pPr algn="ctr"/>
-                      <a:r>
-                        <a:rPr sz="950" b="1">
-                          <a:solidFill>
-                            <a:srgbClr val="FFFFFF"/>
-                          </a:solidFill>
-                          <a:latin typeface="Calibri"/>
-                        </a:rPr>
-                        <a:t>Out-of-Time-Bound)</a:t>
-                      </a:r>
-                    </a:p>
-                  </a:txBody>
-                  <a:tcPr anchor="ctr" marL="73152" marR="73152" marT="18288" marB="18288">
-                    <a:solidFill>
-                      <a:srgbClr val="1B2A4A"/>
-                    </a:solidFill>
-                  </a:tcPr>
-                </a:tc>
-                <a:tc>
-                  <a:txBody>
-                    <a:bodyPr wrap="square"/>
-                    <a:lstStyle/>
-                    <a:p>
-                      <a:pPr algn="ctr"/>
-                      <a:r>
-                        <a:rPr sz="950" b="1">
-                          <a:solidFill>
-                            <a:srgbClr val="FFFFFF"/>
-                          </a:solidFill>
-                          <a:latin typeface="Calibri"/>
-                        </a:rPr>
-                        <a:t>Incidents</a:t>
-                      </a:r>
-                    </a:p>
-                    <a:p>
-                      <a:pPr algn="ctr"/>
-                      <a:r>
-                        <a:rPr sz="950" b="1">
-                          <a:solidFill>
-                            <a:srgbClr val="FFFFFF"/>
-                          </a:solidFill>
-                          <a:latin typeface="Calibri"/>
-                        </a:rPr>
-                        <a:t>Avoided</a:t>
+                        <a:t>(Late Arrival / Out-of-Time-Bound)</a:t>
                       </a:r>
                     </a:p>
                   </a:txBody>
@@ -4477,7 +4444,7 @@
                   </a:tcPr>
                 </a:tc>
               </a:tr>
-              <a:tr h="301752">
+              <a:tr h="262128">
                 <a:tc>
                   <a:txBody>
                     <a:bodyPr wrap="square"/>
@@ -4508,7 +4475,7 @@
                     <a:p>
                       <a:pPr algn="ctr"/>
                       <a:r>
-                        <a:rPr sz="1100" b="0">
+                        <a:rPr sz="1100">
                           <a:solidFill>
                             <a:srgbClr val="1B2A4A"/>
                           </a:solidFill>
@@ -4531,7 +4498,7 @@
                     <a:p>
                       <a:pPr algn="ctr"/>
                       <a:r>
-                        <a:rPr sz="1100" b="0">
+                        <a:rPr sz="1100">
                           <a:solidFill>
                             <a:srgbClr val="1B2A4A"/>
                           </a:solidFill>
@@ -4554,7 +4521,7 @@
                     <a:p>
                       <a:pPr algn="ctr"/>
                       <a:r>
-                        <a:rPr sz="1100" b="0">
+                        <a:rPr sz="1100">
                           <a:solidFill>
                             <a:srgbClr val="1B2A4A"/>
                           </a:solidFill>
@@ -4577,13 +4544,36 @@
                     <a:p>
                       <a:pPr algn="ctr"/>
                       <a:r>
-                        <a:rPr sz="1100" b="0">
+                        <a:rPr sz="1100">
                           <a:solidFill>
                             <a:srgbClr val="1B2A4A"/>
                           </a:solidFill>
                           <a:latin typeface="Calibri"/>
                         </a:rPr>
                         <a:t>1h 50m</a:t>
+                      </a:r>
+                    </a:p>
+                  </a:txBody>
+                  <a:tcPr anchor="ctr" marL="73152" marR="73152" marT="18288" marB="18288">
+                    <a:solidFill>
+                      <a:srgbClr val="FFFFFF"/>
+                    </a:solidFill>
+                  </a:tcPr>
+                </a:tc>
+                <a:tc>
+                  <a:txBody>
+                    <a:bodyPr wrap="square"/>
+                    <a:lstStyle/>
+                    <a:p>
+                      <a:pPr algn="ctr"/>
+                      <a:r>
+                        <a:rPr sz="1100" b="1">
+                          <a:solidFill>
+                            <a:srgbClr val="1E7A4C"/>
+                          </a:solidFill>
+                          <a:latin typeface="Calibri"/>
+                        </a:rPr>
+                        <a:t>4</a:t>
                       </a:r>
                     </a:p>
                   </a:txBody>
@@ -4616,31 +4606,8 @@
                     </a:solidFill>
                   </a:tcPr>
                 </a:tc>
-                <a:tc>
-                  <a:txBody>
-                    <a:bodyPr wrap="square"/>
-                    <a:lstStyle/>
-                    <a:p>
-                      <a:pPr algn="ctr"/>
-                      <a:r>
-                        <a:rPr sz="1100" b="1">
-                          <a:solidFill>
-                            <a:srgbClr val="1E7A4C"/>
-                          </a:solidFill>
-                          <a:latin typeface="Calibri"/>
-                        </a:rPr>
-                        <a:t>4</a:t>
-                      </a:r>
-                    </a:p>
-                  </a:txBody>
-                  <a:tcPr anchor="ctr" marL="73152" marR="73152" marT="18288" marB="18288">
-                    <a:solidFill>
-                      <a:srgbClr val="FFFFFF"/>
-                    </a:solidFill>
-                  </a:tcPr>
-                </a:tc>
               </a:tr>
-              <a:tr h="301752">
+              <a:tr h="262128">
                 <a:tc>
                   <a:txBody>
                     <a:bodyPr wrap="square"/>
@@ -4671,7 +4638,7 @@
                     <a:p>
                       <a:pPr algn="ctr"/>
                       <a:r>
-                        <a:rPr sz="1100" b="0">
+                        <a:rPr sz="1100">
                           <a:solidFill>
                             <a:srgbClr val="1B2A4A"/>
                           </a:solidFill>
@@ -4694,7 +4661,7 @@
                     <a:p>
                       <a:pPr algn="ctr"/>
                       <a:r>
-                        <a:rPr sz="1100" b="0">
+                        <a:rPr sz="1100">
                           <a:solidFill>
                             <a:srgbClr val="1B2A4A"/>
                           </a:solidFill>
@@ -4717,7 +4684,7 @@
                     <a:p>
                       <a:pPr algn="ctr"/>
                       <a:r>
-                        <a:rPr sz="1100" b="0">
+                        <a:rPr sz="1100">
                           <a:solidFill>
                             <a:srgbClr val="1B2A4A"/>
                           </a:solidFill>
@@ -4740,13 +4707,36 @@
                     <a:p>
                       <a:pPr algn="ctr"/>
                       <a:r>
-                        <a:rPr sz="1100" b="0">
+                        <a:rPr sz="1100">
                           <a:solidFill>
                             <a:srgbClr val="1B2A4A"/>
                           </a:solidFill>
                           <a:latin typeface="Calibri"/>
                         </a:rPr>
                         <a:t>2h 05m</a:t>
+                      </a:r>
+                    </a:p>
+                  </a:txBody>
+                  <a:tcPr anchor="ctr" marL="73152" marR="73152" marT="18288" marB="18288">
+                    <a:solidFill>
+                      <a:srgbClr val="F0F3F7"/>
+                    </a:solidFill>
+                  </a:tcPr>
+                </a:tc>
+                <a:tc>
+                  <a:txBody>
+                    <a:bodyPr wrap="square"/>
+                    <a:lstStyle/>
+                    <a:p>
+                      <a:pPr algn="ctr"/>
+                      <a:r>
+                        <a:rPr sz="1100" b="1">
+                          <a:solidFill>
+                            <a:srgbClr val="1E7A4C"/>
+                          </a:solidFill>
+                          <a:latin typeface="Calibri"/>
+                        </a:rPr>
+                        <a:t>6</a:t>
                       </a:r>
                     </a:p>
                   </a:txBody>
@@ -4779,31 +4769,8 @@
                     </a:solidFill>
                   </a:tcPr>
                 </a:tc>
-                <a:tc>
-                  <a:txBody>
-                    <a:bodyPr wrap="square"/>
-                    <a:lstStyle/>
-                    <a:p>
-                      <a:pPr algn="ctr"/>
-                      <a:r>
-                        <a:rPr sz="1100" b="1">
-                          <a:solidFill>
-                            <a:srgbClr val="1E7A4C"/>
-                          </a:solidFill>
-                          <a:latin typeface="Calibri"/>
-                        </a:rPr>
-                        <a:t>6</a:t>
-                      </a:r>
-                    </a:p>
-                  </a:txBody>
-                  <a:tcPr anchor="ctr" marL="73152" marR="73152" marT="18288" marB="18288">
-                    <a:solidFill>
-                      <a:srgbClr val="F0F3F7"/>
-                    </a:solidFill>
-                  </a:tcPr>
-                </a:tc>
               </a:tr>
-              <a:tr h="301752">
+              <a:tr h="262128">
                 <a:tc>
                   <a:txBody>
                     <a:bodyPr wrap="square"/>
@@ -4834,7 +4801,7 @@
                     <a:p>
                       <a:pPr algn="ctr"/>
                       <a:r>
-                        <a:rPr sz="1100" b="0">
+                        <a:rPr sz="1100">
                           <a:solidFill>
                             <a:srgbClr val="1B2A4A"/>
                           </a:solidFill>
@@ -4857,7 +4824,7 @@
                     <a:p>
                       <a:pPr algn="ctr"/>
                       <a:r>
-                        <a:rPr sz="1100" b="0">
+                        <a:rPr sz="1100">
                           <a:solidFill>
                             <a:srgbClr val="1B2A4A"/>
                           </a:solidFill>
@@ -4880,7 +4847,7 @@
                     <a:p>
                       <a:pPr algn="ctr"/>
                       <a:r>
-                        <a:rPr sz="1100" b="0">
+                        <a:rPr sz="1100">
                           <a:solidFill>
                             <a:srgbClr val="1B2A4A"/>
                           </a:solidFill>
@@ -4903,13 +4870,36 @@
                     <a:p>
                       <a:pPr algn="ctr"/>
                       <a:r>
-                        <a:rPr sz="1100" b="0">
+                        <a:rPr sz="1100">
                           <a:solidFill>
                             <a:srgbClr val="1B2A4A"/>
                           </a:solidFill>
                           <a:latin typeface="Calibri"/>
                         </a:rPr>
                         <a:t>1h 20m</a:t>
+                      </a:r>
+                    </a:p>
+                  </a:txBody>
+                  <a:tcPr anchor="ctr" marL="73152" marR="73152" marT="18288" marB="18288">
+                    <a:solidFill>
+                      <a:srgbClr val="FFFFFF"/>
+                    </a:solidFill>
+                  </a:tcPr>
+                </a:tc>
+                <a:tc>
+                  <a:txBody>
+                    <a:bodyPr wrap="square"/>
+                    <a:lstStyle/>
+                    <a:p>
+                      <a:pPr algn="ctr"/>
+                      <a:r>
+                        <a:rPr sz="1100" b="1">
+                          <a:solidFill>
+                            <a:srgbClr val="1E7A4C"/>
+                          </a:solidFill>
+                          <a:latin typeface="Calibri"/>
+                        </a:rPr>
+                        <a:t>2</a:t>
                       </a:r>
                     </a:p>
                   </a:txBody>
@@ -4942,31 +4932,8 @@
                     </a:solidFill>
                   </a:tcPr>
                 </a:tc>
-                <a:tc>
-                  <a:txBody>
-                    <a:bodyPr wrap="square"/>
-                    <a:lstStyle/>
-                    <a:p>
-                      <a:pPr algn="ctr"/>
-                      <a:r>
-                        <a:rPr sz="1100" b="1">
-                          <a:solidFill>
-                            <a:srgbClr val="1E7A4C"/>
-                          </a:solidFill>
-                          <a:latin typeface="Calibri"/>
-                        </a:rPr>
-                        <a:t>2</a:t>
-                      </a:r>
-                    </a:p>
-                  </a:txBody>
-                  <a:tcPr anchor="ctr" marL="73152" marR="73152" marT="18288" marB="18288">
-                    <a:solidFill>
-                      <a:srgbClr val="FFFFFF"/>
-                    </a:solidFill>
-                  </a:tcPr>
-                </a:tc>
               </a:tr>
-              <a:tr h="301752">
+              <a:tr h="262128">
                 <a:tc>
                   <a:txBody>
                     <a:bodyPr wrap="square"/>
@@ -4997,7 +4964,7 @@
                     <a:p>
                       <a:pPr algn="ctr"/>
                       <a:r>
-                        <a:rPr sz="1100" b="0">
+                        <a:rPr sz="1100">
                           <a:solidFill>
                             <a:srgbClr val="1B2A4A"/>
                           </a:solidFill>
@@ -5020,7 +4987,7 @@
                     <a:p>
                       <a:pPr algn="ctr"/>
                       <a:r>
-                        <a:rPr sz="1100" b="0">
+                        <a:rPr sz="1100">
                           <a:solidFill>
                             <a:srgbClr val="1B2A4A"/>
                           </a:solidFill>
@@ -5043,7 +5010,7 @@
                     <a:p>
                       <a:pPr algn="ctr"/>
                       <a:r>
-                        <a:rPr sz="1100" b="0">
+                        <a:rPr sz="1100">
                           <a:solidFill>
                             <a:srgbClr val="1B2A4A"/>
                           </a:solidFill>
@@ -5066,13 +5033,36 @@
                     <a:p>
                       <a:pPr algn="ctr"/>
                       <a:r>
-                        <a:rPr sz="1100" b="0">
+                        <a:rPr sz="1100">
                           <a:solidFill>
                             <a:srgbClr val="1B2A4A"/>
                           </a:solidFill>
                           <a:latin typeface="Calibri"/>
                         </a:rPr>
                         <a:t>1h 55m</a:t>
+                      </a:r>
+                    </a:p>
+                  </a:txBody>
+                  <a:tcPr anchor="ctr" marL="73152" marR="73152" marT="18288" marB="18288">
+                    <a:solidFill>
+                      <a:srgbClr val="F0F3F7"/>
+                    </a:solidFill>
+                  </a:tcPr>
+                </a:tc>
+                <a:tc>
+                  <a:txBody>
+                    <a:bodyPr wrap="square"/>
+                    <a:lstStyle/>
+                    <a:p>
+                      <a:pPr algn="ctr"/>
+                      <a:r>
+                        <a:rPr sz="1100" b="1">
+                          <a:solidFill>
+                            <a:srgbClr val="1E7A4C"/>
+                          </a:solidFill>
+                          <a:latin typeface="Calibri"/>
+                        </a:rPr>
+                        <a:t>5</a:t>
                       </a:r>
                     </a:p>
                   </a:txBody>
@@ -5105,31 +5095,8 @@
                     </a:solidFill>
                   </a:tcPr>
                 </a:tc>
-                <a:tc>
-                  <a:txBody>
-                    <a:bodyPr wrap="square"/>
-                    <a:lstStyle/>
-                    <a:p>
-                      <a:pPr algn="ctr"/>
-                      <a:r>
-                        <a:rPr sz="1100" b="1">
-                          <a:solidFill>
-                            <a:srgbClr val="1E7A4C"/>
-                          </a:solidFill>
-                          <a:latin typeface="Calibri"/>
-                        </a:rPr>
-                        <a:t>5</a:t>
-                      </a:r>
-                    </a:p>
-                  </a:txBody>
-                  <a:tcPr anchor="ctr" marL="73152" marR="73152" marT="18288" marB="18288">
-                    <a:solidFill>
-                      <a:srgbClr val="F0F3F7"/>
-                    </a:solidFill>
-                  </a:tcPr>
-                </a:tc>
               </a:tr>
-              <a:tr h="301752">
+              <a:tr h="262128">
                 <a:tc>
                   <a:txBody>
                     <a:bodyPr wrap="square"/>
@@ -5160,7 +5127,7 @@
                     <a:p>
                       <a:pPr algn="ctr"/>
                       <a:r>
-                        <a:rPr sz="1100" b="0">
+                        <a:rPr sz="1100">
                           <a:solidFill>
                             <a:srgbClr val="1B2A4A"/>
                           </a:solidFill>
@@ -5183,7 +5150,7 @@
                     <a:p>
                       <a:pPr algn="ctr"/>
                       <a:r>
-                        <a:rPr sz="1100" b="0">
+                        <a:rPr sz="1100">
                           <a:solidFill>
                             <a:srgbClr val="1B2A4A"/>
                           </a:solidFill>
@@ -5206,7 +5173,7 @@
                     <a:p>
                       <a:pPr algn="ctr"/>
                       <a:r>
-                        <a:rPr sz="1100" b="0">
+                        <a:rPr sz="1100">
                           <a:solidFill>
                             <a:srgbClr val="1B2A4A"/>
                           </a:solidFill>
@@ -5229,13 +5196,36 @@
                     <a:p>
                       <a:pPr algn="ctr"/>
                       <a:r>
-                        <a:rPr sz="1100" b="0">
+                        <a:rPr sz="1100">
                           <a:solidFill>
                             <a:srgbClr val="1B2A4A"/>
                           </a:solidFill>
                           <a:latin typeface="Calibri"/>
                         </a:rPr>
                         <a:t>2h 10m</a:t>
+                      </a:r>
+                    </a:p>
+                  </a:txBody>
+                  <a:tcPr anchor="ctr" marL="73152" marR="73152" marT="18288" marB="18288">
+                    <a:solidFill>
+                      <a:srgbClr val="FFFFFF"/>
+                    </a:solidFill>
+                  </a:tcPr>
+                </a:tc>
+                <a:tc>
+                  <a:txBody>
+                    <a:bodyPr wrap="square"/>
+                    <a:lstStyle/>
+                    <a:p>
+                      <a:pPr algn="ctr"/>
+                      <a:r>
+                        <a:rPr sz="1100" b="1">
+                          <a:solidFill>
+                            <a:srgbClr val="1E7A4C"/>
+                          </a:solidFill>
+                          <a:latin typeface="Calibri"/>
+                        </a:rPr>
+                        <a:t>3</a:t>
                       </a:r>
                     </a:p>
                   </a:txBody>
@@ -5268,31 +5258,8 @@
                     </a:solidFill>
                   </a:tcPr>
                 </a:tc>
-                <a:tc>
-                  <a:txBody>
-                    <a:bodyPr wrap="square"/>
-                    <a:lstStyle/>
-                    <a:p>
-                      <a:pPr algn="ctr"/>
-                      <a:r>
-                        <a:rPr sz="1100" b="1">
-                          <a:solidFill>
-                            <a:srgbClr val="1E7A4C"/>
-                          </a:solidFill>
-                          <a:latin typeface="Calibri"/>
-                        </a:rPr>
-                        <a:t>3</a:t>
-                      </a:r>
-                    </a:p>
-                  </a:txBody>
-                  <a:tcPr anchor="ctr" marL="73152" marR="73152" marT="18288" marB="18288">
-                    <a:solidFill>
-                      <a:srgbClr val="FFFFFF"/>
-                    </a:solidFill>
-                  </a:tcPr>
-                </a:tc>
               </a:tr>
-              <a:tr h="301752">
+              <a:tr h="262128">
                 <a:tc>
                   <a:txBody>
                     <a:bodyPr wrap="square"/>
@@ -5323,7 +5290,7 @@
                     <a:p>
                       <a:pPr algn="ctr"/>
                       <a:r>
-                        <a:rPr sz="1100" b="0">
+                        <a:rPr sz="1100">
                           <a:solidFill>
                             <a:srgbClr val="1B2A4A"/>
                           </a:solidFill>
@@ -5346,7 +5313,7 @@
                     <a:p>
                       <a:pPr algn="ctr"/>
                       <a:r>
-                        <a:rPr sz="1100" b="0">
+                        <a:rPr sz="1100">
                           <a:solidFill>
                             <a:srgbClr val="1B2A4A"/>
                           </a:solidFill>
@@ -5369,7 +5336,7 @@
                     <a:p>
                       <a:pPr algn="ctr"/>
                       <a:r>
-                        <a:rPr sz="1100" b="0">
+                        <a:rPr sz="1100">
                           <a:solidFill>
                             <a:srgbClr val="1B2A4A"/>
                           </a:solidFill>
@@ -5392,7 +5359,7 @@
                     <a:p>
                       <a:pPr algn="ctr"/>
                       <a:r>
-                        <a:rPr sz="1100" b="0">
+                        <a:rPr sz="1100">
                           <a:solidFill>
                             <a:srgbClr val="1B2A4A"/>
                           </a:solidFill>
@@ -5417,11 +5384,11 @@
                       <a:r>
                         <a:rPr sz="1100" b="1">
                           <a:solidFill>
-                            <a:srgbClr val="A6352C"/>
+                            <a:srgbClr val="1E7A4C"/>
                           </a:solidFill>
                           <a:latin typeface="Calibri"/>
                         </a:rPr>
-                        <a:t>10</a:t>
+                        <a:t>7</a:t>
                       </a:r>
                     </a:p>
                   </a:txBody>
@@ -5440,11 +5407,11 @@
                       <a:r>
                         <a:rPr sz="1100" b="1">
                           <a:solidFill>
-                            <a:srgbClr val="1E7A4C"/>
+                            <a:srgbClr val="A6352C"/>
                           </a:solidFill>
                           <a:latin typeface="Calibri"/>
                         </a:rPr>
-                        <a:t>7</a:t>
+                        <a:t>10</a:t>
                       </a:r>
                     </a:p>
                   </a:txBody>
